--- a/FAIR-project-group9-presentation.pptx
+++ b/FAIR-project-group9-presentation.pptx
@@ -239,7 +239,7 @@
           <a:p>
             <a:fld id="{DB6139C4-A8C9-4D53-83DC-10B91B618373}" type="datetimeFigureOut">
               <a:rPr lang="el-GR" smtClean="0"/>
-              <a:t>25/10/2026</a:t>
+              <a:t>28/10/2026</a:t>
             </a:fld>
             <a:endParaRPr lang="el-GR"/>
           </a:p>
@@ -551,26 +551,6 @@
           <a:bodyPr/>
           <a:lstStyle/>
           <a:p>
-            <a:r>
-              <a:rPr lang="en-US" dirty="0"/>
-              <a:t>Good morning everyone. We are Giorgos and Nefeli, and today we will present our project on the </a:t>
-            </a:r>
-            <a:r>
-              <a:rPr lang="en-US" dirty="0" err="1"/>
-              <a:t>FAIRification</a:t>
-            </a:r>
-            <a:r>
-              <a:rPr lang="en-US" dirty="0"/>
-              <a:t> of Premier League player statistics for the 2024–2025 season.</a:t>
-            </a:r>
-          </a:p>
-          <a:p>
-            <a:r>
-              <a:rPr lang="en-US" dirty="0"/>
-              <a:t>We will explain how we selected and prepared the data, transformed it into RDF, created metadata, and improved its potential for reuse and interoperability.</a:t>
-            </a:r>
-          </a:p>
-          <a:p>
             <a:endParaRPr lang="en-US" dirty="0"/>
           </a:p>
         </p:txBody>
@@ -655,38 +635,6 @@
           <a:bodyPr/>
           <a:lstStyle/>
           <a:p>
-            <a:r>
-              <a:rPr lang="en-US" dirty="0"/>
-              <a:t>We published the project resources in a GitHub repository. These resources include the original data, the </a:t>
-            </a:r>
-            <a:r>
-              <a:rPr lang="en-US" dirty="0" err="1"/>
-              <a:t>FAIRified</a:t>
-            </a:r>
-            <a:r>
-              <a:rPr lang="en-US" dirty="0"/>
-              <a:t> RDF dataset, the ontology, and the metadata files.</a:t>
-            </a:r>
-          </a:p>
-          <a:p>
-            <a:r>
-              <a:rPr lang="en-US" dirty="0"/>
-              <a:t>We also assigned W3ID identifiers to the ontology and both data distributions, linking those identifiers to the corresponding resources.</a:t>
-            </a:r>
-          </a:p>
-          <a:p>
-            <a:r>
-              <a:rPr lang="en-US" dirty="0"/>
-              <a:t>Persistent identifiers help other people refer to the resources consistently, while publishing the files and metadata makes them easier to discover and access.</a:t>
-            </a:r>
-          </a:p>
-          <a:p>
-            <a:r>
-              <a:rPr lang="en-US" dirty="0"/>
-              <a:t>The repository therefore acts as the main location for sharing the outputs of our project.</a:t>
-            </a:r>
-          </a:p>
-          <a:p>
             <a:endParaRPr lang="el-GR" dirty="0"/>
           </a:p>
         </p:txBody>
@@ -771,66 +719,7 @@
           <a:bodyPr/>
           <a:lstStyle/>
           <a:p>
-            <a:r>
-              <a:rPr lang="en-US" dirty="0"/>
-              <a:t>We can now </a:t>
-            </a:r>
-            <a:r>
-              <a:rPr lang="en-US" dirty="0" err="1"/>
-              <a:t>summarise</a:t>
-            </a:r>
-            <a:r>
-              <a:rPr lang="en-US" dirty="0"/>
-              <a:t> our work in terms of the four FAIR principles.</a:t>
-            </a:r>
-          </a:p>
-          <a:p>
-            <a:r>
-              <a:rPr lang="en-US" dirty="0"/>
-              <a:t>For Findability, we created descriptive metadata and assigned W3ID identifiers to the ontology and data distributions.</a:t>
-            </a:r>
-          </a:p>
-          <a:p>
-            <a:r>
-              <a:rPr lang="en-US" dirty="0"/>
-              <a:t>For Accessibility, we published the resources on GitHub and provided both the original </a:t>
-            </a:r>
-            <a:r>
-              <a:rPr lang="en-GB" dirty="0"/>
-              <a:t>data</a:t>
-            </a:r>
-            <a:r>
-              <a:rPr lang="en-US" dirty="0"/>
-              <a:t> and the </a:t>
-            </a:r>
-            <a:r>
-              <a:rPr lang="en-US" dirty="0" err="1"/>
-              <a:t>FAIRified</a:t>
-            </a:r>
-            <a:r>
-              <a:rPr lang="en-US" dirty="0"/>
-              <a:t> Turtle file.</a:t>
-            </a:r>
-          </a:p>
-          <a:p>
-            <a:r>
-              <a:rPr lang="en-US" dirty="0"/>
-              <a:t>For Interoperability, we represented the data in RDF, used a project-specific ontology, and linked selected entities to </a:t>
-            </a:r>
-            <a:r>
-              <a:rPr lang="en-US" dirty="0" err="1"/>
-              <a:t>Wikidata</a:t>
-            </a:r>
-            <a:r>
-              <a:rPr lang="en-US" dirty="0"/>
-              <a:t>.</a:t>
-            </a:r>
-          </a:p>
-          <a:p>
-            <a:r>
-              <a:rPr lang="en-US" dirty="0"/>
-              <a:t>Finally, for Reusability, we documented the preparation and transformation process and included metadata about provenance and licensing.</a:t>
-            </a:r>
+            <a:endParaRPr lang="en-US" dirty="0"/>
           </a:p>
         </p:txBody>
       </p:sp>
@@ -913,43 +802,6 @@
         <p:txBody>
           <a:bodyPr/>
           <a:lstStyle/>
-          <a:p>
-            <a:r>
-              <a:rPr lang="en-US" dirty="0"/>
-              <a:t>Our work also creates opportunities for future use.</a:t>
-            </a:r>
-          </a:p>
-          <a:p>
-            <a:r>
-              <a:rPr lang="en-US" dirty="0"/>
-              <a:t>The player statistics can support comparisons based on goals, assists, expected goals, and expected assists. Because the data is represented in RDF and selected entities are linked to </a:t>
-            </a:r>
-            <a:r>
-              <a:rPr lang="en-GB" dirty="0"/>
-              <a:t>external entities</a:t>
-            </a:r>
-            <a:r>
-              <a:rPr lang="en-US" dirty="0"/>
-              <a:t>, it may also be easier to connect the dataset to additional resources in the future.</a:t>
-            </a:r>
-          </a:p>
-          <a:p>
-            <a:r>
-              <a:rPr lang="en-US" dirty="0"/>
-              <a:t>However, full integration with other football datasets would require further work, including identifying compatible data, establishing the relevant links, and incorporating additional information.</a:t>
-            </a:r>
-          </a:p>
-          <a:p>
-            <a:r>
-              <a:rPr lang="en-US" dirty="0"/>
-              <a:t>We therefore consider broader data linking and integration as future opportunities</a:t>
-            </a:r>
-            <a:r>
-              <a:rPr lang="en-GB" dirty="0"/>
-              <a:t>.</a:t>
-            </a:r>
-            <a:endParaRPr lang="en-US" dirty="0"/>
-          </a:p>
           <a:p>
             <a:endParaRPr lang="en-US" dirty="0"/>
           </a:p>
@@ -1060,61 +912,6 @@
           <a:bodyPr/>
           <a:lstStyle/>
           <a:p>
-            <a:r>
-              <a:rPr lang="en-US" dirty="0"/>
-              <a:t>During this project, we faced two main challenges.</a:t>
-            </a:r>
-          </a:p>
-          <a:p>
-            <a:endParaRPr lang="en-US" dirty="0"/>
-          </a:p>
-          <a:p>
-            <a:r>
-              <a:rPr lang="en-US" dirty="0"/>
-              <a:t>The first was entity linking: using </a:t>
-            </a:r>
-            <a:r>
-              <a:rPr lang="en-US" dirty="0" err="1"/>
-              <a:t>OpenRefine</a:t>
-            </a:r>
-            <a:r>
-              <a:rPr lang="en-US" dirty="0"/>
-              <a:t> to reconcile selected values and connect them to external entities.</a:t>
-            </a:r>
-            <a:r>
-              <a:rPr lang="en-GB" dirty="0"/>
-              <a:t>The most difficult part of this process was finding the proper entities to match our data.  </a:t>
-            </a:r>
-            <a:r>
-              <a:rPr lang="en-US" dirty="0"/>
-              <a:t>The second was semantic modelling, which required us to define an ontology and represent our data correctly in RDF.</a:t>
-            </a:r>
-          </a:p>
-          <a:p>
-            <a:endParaRPr lang="en-US" dirty="0"/>
-          </a:p>
-          <a:p>
-            <a:r>
-              <a:rPr lang="en-US" dirty="0"/>
-              <a:t>As future work, we could link the dataset to more football-related resources, include additional seasons, and extend the available player statistics.</a:t>
-            </a:r>
-          </a:p>
-          <a:p>
-            <a:endParaRPr lang="en-US" dirty="0"/>
-          </a:p>
-          <a:p>
-            <a:r>
-              <a:rPr lang="en-US" dirty="0"/>
-              <a:t>Overall, this project showed us how </a:t>
-            </a:r>
-            <a:r>
-              <a:rPr lang="en-US" dirty="0" err="1"/>
-              <a:t>FAIRification</a:t>
-            </a:r>
-            <a:r>
-              <a:rPr lang="en-US" dirty="0"/>
-              <a:t> involves more than changing a file format: it also requires semantic modelling, metadata, identifiers, and a plan for making data reusable.</a:t>
-            </a:r>
             <a:endParaRPr lang="el-GR" dirty="0"/>
           </a:p>
         </p:txBody>
@@ -1152,6 +949,90 @@
     <p:extLst>
       <p:ext uri="{BB962C8B-B14F-4D97-AF65-F5344CB8AC3E}">
         <p14:creationId xmlns:p14="http://schemas.microsoft.com/office/powerpoint/2010/main" val="3544107504"/>
+      </p:ext>
+    </p:extLst>
+  </p:cSld>
+  <p:clrMapOvr>
+    <a:masterClrMapping/>
+  </p:clrMapOvr>
+</p:notes>
+</file>
+
+<file path=ppt/notesSlides/notesSlide14.xml><?xml version="1.0" encoding="utf-8"?>
+<p:notes xmlns:a="http://schemas.openxmlformats.org/drawingml/2006/main" xmlns:r="http://schemas.openxmlformats.org/officeDocument/2006/relationships" xmlns:p="http://schemas.openxmlformats.org/presentationml/2006/main">
+  <p:cSld>
+    <p:spTree>
+      <p:nvGrpSpPr>
+        <p:cNvPr id="1" name=""/>
+        <p:cNvGrpSpPr/>
+        <p:nvPr/>
+      </p:nvGrpSpPr>
+      <p:grpSpPr>
+        <a:xfrm>
+          <a:off x="0" y="0"/>
+          <a:ext cx="0" cy="0"/>
+          <a:chOff x="0" y="0"/>
+          <a:chExt cx="0" cy="0"/>
+        </a:xfrm>
+      </p:grpSpPr>
+      <p:sp>
+        <p:nvSpPr>
+          <p:cNvPr id="2" name="Slide Image Placeholder 1"/>
+          <p:cNvSpPr>
+            <a:spLocks noGrp="1" noRot="1" noChangeAspect="1"/>
+          </p:cNvSpPr>
+          <p:nvPr>
+            <p:ph type="sldImg"/>
+          </p:nvPr>
+        </p:nvSpPr>
+        <p:spPr/>
+      </p:sp>
+      <p:sp>
+        <p:nvSpPr>
+          <p:cNvPr id="3" name="Notes Placeholder 2"/>
+          <p:cNvSpPr>
+            <a:spLocks noGrp="1"/>
+          </p:cNvSpPr>
+          <p:nvPr>
+            <p:ph type="body" idx="1"/>
+          </p:nvPr>
+        </p:nvSpPr>
+        <p:spPr/>
+        <p:txBody>
+          <a:bodyPr/>
+          <a:lstStyle/>
+          <a:p>
+            <a:endParaRPr lang="el-GR" dirty="0"/>
+          </a:p>
+        </p:txBody>
+      </p:sp>
+      <p:sp>
+        <p:nvSpPr>
+          <p:cNvPr id="4" name="Slide Number Placeholder 3"/>
+          <p:cNvSpPr>
+            <a:spLocks noGrp="1"/>
+          </p:cNvSpPr>
+          <p:nvPr>
+            <p:ph type="sldNum" sz="quarter" idx="5"/>
+          </p:nvPr>
+        </p:nvSpPr>
+        <p:spPr/>
+        <p:txBody>
+          <a:bodyPr/>
+          <a:lstStyle/>
+          <a:p>
+            <a:fld id="{2DBFD0E7-A571-4D38-B239-BD25B118AD61}" type="slidenum">
+              <a:rPr lang="el-GR" smtClean="0"/>
+              <a:t>14</a:t>
+            </a:fld>
+            <a:endParaRPr lang="el-GR"/>
+          </a:p>
+        </p:txBody>
+      </p:sp>
+    </p:spTree>
+    <p:extLst>
+      <p:ext uri="{BB962C8B-B14F-4D97-AF65-F5344CB8AC3E}">
+        <p14:creationId xmlns:p14="http://schemas.microsoft.com/office/powerpoint/2010/main" val="2598822851"/>
       </p:ext>
     </p:extLst>
   </p:cSld>
@@ -1211,32 +1092,6 @@
         <p:txBody>
           <a:bodyPr/>
           <a:lstStyle/>
-          <a:p>
-            <a:r>
-              <a:rPr lang="en-US" dirty="0"/>
-              <a:t>Our project is based on a dataset from Kaggle called “Premier League Data from 2016 to 2025.”</a:t>
-            </a:r>
-          </a:p>
-          <a:p>
-            <a:r>
-              <a:rPr lang="en-US" dirty="0"/>
-              <a:t>The original dataset contains information from multiple seasons, including club statistics, player profiles, and performance metrics. We decided to focus on the 2024–2025 season and specifically on player information and performance statistics.</a:t>
-            </a:r>
-          </a:p>
-          <a:p>
-            <a:r>
-              <a:rPr lang="en-US" dirty="0"/>
-              <a:t>We selected two CSV files containing complementary information, which we later combined into a single dataset for our </a:t>
-            </a:r>
-            <a:r>
-              <a:rPr lang="en-US" dirty="0" err="1"/>
-              <a:t>FAIRification</a:t>
-            </a:r>
-            <a:r>
-              <a:rPr lang="en-US" dirty="0"/>
-              <a:t> process.</a:t>
-            </a:r>
-          </a:p>
           <a:p>
             <a:endParaRPr lang="el-GR" dirty="0"/>
           </a:p>
@@ -1329,38 +1184,6 @@
           <a:bodyPr/>
           <a:lstStyle/>
           <a:p>
-            <a:r>
-              <a:rPr lang="en-US" dirty="0"/>
-              <a:t>Before starting, we defined the main goals of our </a:t>
-            </a:r>
-            <a:r>
-              <a:rPr lang="en-US" dirty="0" err="1"/>
-              <a:t>FAIRification</a:t>
-            </a:r>
-            <a:r>
-              <a:rPr lang="en-US" dirty="0"/>
-              <a:t> process.</a:t>
-            </a:r>
-          </a:p>
-          <a:p>
-            <a:r>
-              <a:rPr lang="en-US" dirty="0"/>
-              <a:t>First, we wanted to integrate the two CSV files into one dataset. Second, we aimed to enrich the data semantically by linking relevant entities to external resources.</a:t>
-            </a:r>
-          </a:p>
-          <a:p>
-            <a:r>
-              <a:rPr lang="en-US" dirty="0"/>
-              <a:t>We then planned to transform the data into RDF, create descriptive metadata, assign persistent identifiers, and publish the resources on GitHub.</a:t>
-            </a:r>
-          </a:p>
-          <a:p>
-            <a:r>
-              <a:rPr lang="en-US" dirty="0"/>
-              <a:t>These steps were intended to improve the findability, accessibility, interoperability, and reusability of our dataset.</a:t>
-            </a:r>
-          </a:p>
-          <a:p>
             <a:endParaRPr lang="el-GR" dirty="0"/>
           </a:p>
         </p:txBody>
@@ -1445,24 +1268,6 @@
           <a:bodyPr/>
           <a:lstStyle/>
           <a:p>
-            <a:r>
-              <a:rPr lang="en-US" dirty="0"/>
-              <a:t>We identified several groups that could benefit from our dataset.</a:t>
-            </a:r>
-          </a:p>
-          <a:p>
-            <a:r>
-              <a:rPr lang="en-US" dirty="0"/>
-              <a:t>Football analysts and statisticians could use it to compare player performance. Researchers and students could use it for academic projects, while football clubs and scouting analysts could explore player statistics.</a:t>
-            </a:r>
-          </a:p>
-          <a:p>
-            <a:r>
-              <a:rPr lang="en-US" dirty="0"/>
-              <a:t>Also, data scientists and developers could reuse the structured data in analytical applications or potentially combine it with other football datasets.</a:t>
-            </a:r>
-          </a:p>
-          <a:p>
             <a:endParaRPr lang="en-US" dirty="0"/>
           </a:p>
         </p:txBody>
@@ -1547,40 +1352,6 @@
           <a:bodyPr/>
           <a:lstStyle/>
           <a:p>
-            <a:r>
-              <a:rPr lang="en-US" dirty="0"/>
-              <a:t>We started with two CSV files: one containing player information and another containing performance statistics for the 2024–2025 season.</a:t>
-            </a:r>
-          </a:p>
-          <a:p>
-            <a:r>
-              <a:rPr lang="en-US" dirty="0"/>
-              <a:t>To keep the project manageable, we selected ten relevant properties, we merged the selected columns into one CSV file and cleaned and prepared the resulting data.</a:t>
-            </a:r>
-          </a:p>
-          <a:p>
-            <a:r>
-              <a:rPr lang="en-US" dirty="0"/>
-              <a:t>We also used </a:t>
-            </a:r>
-            <a:r>
-              <a:rPr lang="en-US" dirty="0" err="1"/>
-              <a:t>OpenRefine</a:t>
-            </a:r>
-            <a:r>
-              <a:rPr lang="en-US" dirty="0"/>
-              <a:t> to reconcile relevant entities with </a:t>
-            </a:r>
-            <a:r>
-              <a:rPr lang="en-US" dirty="0" err="1"/>
-              <a:t>Wikidata</a:t>
-            </a:r>
-            <a:r>
-              <a:rPr lang="en-US" dirty="0"/>
-              <a:t>. This allowed us to connect selected values to external identifiers instead of representing everything only as plain text.</a:t>
-            </a:r>
-          </a:p>
-          <a:p>
             <a:endParaRPr lang="en-US" dirty="0"/>
           </a:p>
         </p:txBody>
@@ -1672,30 +1443,6 @@
           <a:bodyPr/>
           <a:lstStyle/>
           <a:p>
-            <a:r>
-              <a:rPr lang="en-US" dirty="0"/>
-              <a:t>After preparing the data, we designed our semantic data model.</a:t>
-            </a:r>
-          </a:p>
-          <a:p>
-            <a:r>
-              <a:rPr lang="en-US" dirty="0"/>
-              <a:t>The main class is Football Player, which we defined specifically for our project. We also reused existing concepts for Country, Sports Club, Football Position, and Laterality from external vocabularies.</a:t>
-            </a:r>
-          </a:p>
-          <a:p>
-            <a:r>
-              <a:rPr lang="en-US" dirty="0"/>
-              <a:t>Where appropriate, we reused existing properties to describe information such as a player's name, date of birth, nationality, club membership, position, and preferred foot.</a:t>
-            </a:r>
-          </a:p>
-          <a:p>
-            <a:r>
-              <a:rPr lang="en-US" dirty="0"/>
-              <a:t>For performance statistics, we created project-specific properties for goals, assists, expected goals, and expected assists, using Protégé,. This model defines how the different concepts and properties are represented and related in our RDF dataset.</a:t>
-            </a:r>
-          </a:p>
-          <a:p>
             <a:endParaRPr lang="el-GR" dirty="0"/>
           </a:p>
         </p:txBody>
@@ -1787,57 +1534,6 @@
           <a:bodyPr/>
           <a:lstStyle/>
           <a:p>
-            <a:r>
-              <a:rPr lang="en-US" dirty="0"/>
-              <a:t>Next, we transformed the prepared CSV file into RDF using the RDF extension in </a:t>
-            </a:r>
-            <a:r>
-              <a:rPr lang="en-US" dirty="0" err="1"/>
-              <a:t>OpenRefine</a:t>
-            </a:r>
-            <a:r>
-              <a:rPr lang="en-US" dirty="0"/>
-              <a:t>.</a:t>
-            </a:r>
-          </a:p>
-          <a:p>
-            <a:r>
-              <a:rPr lang="en-US" dirty="0"/>
-              <a:t>As we know RDF represents data as triples: a subject, a predicate, and an object.  For our dataset, the subject of all triples is the Football Player entity.</a:t>
-            </a:r>
-          </a:p>
-          <a:p>
-            <a:r>
-              <a:rPr lang="en-US" dirty="0"/>
-              <a:t>We used our semantic model and existing vocabulary terms to describe player information. We also linked selected entities to their corresponding </a:t>
-            </a:r>
-            <a:r>
-              <a:rPr lang="en-US" dirty="0" err="1"/>
-              <a:t>Wikidata</a:t>
-            </a:r>
-            <a:r>
-              <a:rPr lang="en-US" dirty="0"/>
-              <a:t> identifiers.</a:t>
-            </a:r>
-          </a:p>
-          <a:p>
-            <a:r>
-              <a:rPr lang="en-US" dirty="0"/>
-              <a:t>For statistics we used our own project specific properties.</a:t>
-            </a:r>
-          </a:p>
-          <a:p>
-            <a:r>
-              <a:rPr lang="en-US" dirty="0"/>
-              <a:t>Finally, we exported the resulting dataset in Turtle format</a:t>
-            </a:r>
-            <a:r>
-              <a:rPr lang="en-GB" dirty="0"/>
-              <a:t>.</a:t>
-            </a:r>
-            <a:endParaRPr lang="en-US" dirty="0"/>
-          </a:p>
-          <a:p>
             <a:endParaRPr lang="el-GR" dirty="0"/>
           </a:p>
         </p:txBody>
@@ -1922,44 +1618,6 @@
           <a:bodyPr/>
           <a:lstStyle/>
           <a:p>
-            <a:r>
-              <a:rPr lang="en-US" dirty="0"/>
-              <a:t>Besides the player data, we also needed structured metadata to describe our resources.</a:t>
-            </a:r>
-          </a:p>
-          <a:p>
-            <a:r>
-              <a:rPr lang="en-US" dirty="0"/>
-              <a:t>We created two custom SHACL schemas: one for dataset metadata and one for distribution metadata.</a:t>
-            </a:r>
-          </a:p>
-          <a:p>
-            <a:r>
-              <a:rPr lang="en-US" dirty="0"/>
-              <a:t>The dataset schema defines fields such as the title, description, creators, dates, </a:t>
-            </a:r>
-            <a:r>
-              <a:rPr lang="en-US" dirty="0" err="1"/>
-              <a:t>licence</a:t>
-            </a:r>
-            <a:r>
-              <a:rPr lang="en-US" dirty="0"/>
-              <a:t>, and coverage. </a:t>
-            </a:r>
-          </a:p>
-          <a:p>
-            <a:r>
-              <a:rPr lang="en-US" dirty="0"/>
-              <a:t>The distribution schema describes details such as the file format, media type, access and download URLs, file size, and conformance.</a:t>
-            </a:r>
-          </a:p>
-          <a:p>
-            <a:r>
-              <a:rPr lang="en-US" dirty="0"/>
-              <a:t>We also defined validation constraints for required fields, datatypes, and cardinality. These schemas help us check whether our metadata records follow the structure we intended.</a:t>
-            </a:r>
-          </a:p>
-          <a:p>
             <a:endParaRPr lang="en-US" dirty="0"/>
           </a:p>
         </p:txBody>
@@ -2051,38 +1709,6 @@
           <a:bodyPr/>
           <a:lstStyle/>
           <a:p>
-            <a:r>
-              <a:rPr lang="en-US" dirty="0"/>
-              <a:t>Using our metadata schemas, we created records, through FDP, at three levels: the catalog, the dataset, and its distributions.</a:t>
-            </a:r>
-          </a:p>
-          <a:p>
-            <a:r>
-              <a:rPr lang="en-US" dirty="0"/>
-              <a:t>The dataset record provides descriptive information about the Premier League player statistics.</a:t>
-            </a:r>
-          </a:p>
-          <a:p>
-            <a:r>
-              <a:rPr lang="en-US" dirty="0"/>
-              <a:t>We also described two distributions. The original distribution contains the two CSV files packaged together as a ZIP archive. The </a:t>
-            </a:r>
-            <a:r>
-              <a:rPr lang="en-US" dirty="0" err="1"/>
-              <a:t>FAIRified</a:t>
-            </a:r>
-            <a:r>
-              <a:rPr lang="en-US" dirty="0"/>
-              <a:t> distribution contains the transformed data in RDF/Turtle format.</a:t>
-            </a:r>
-          </a:p>
-          <a:p>
-            <a:r>
-              <a:rPr lang="en-US" dirty="0"/>
-              <a:t>This structure makes it clearer what the dataset contains and which versions of the data are available for use.</a:t>
-            </a:r>
-          </a:p>
-          <a:p>
             <a:endParaRPr lang="el-GR" dirty="0"/>
           </a:p>
         </p:txBody>
@@ -2303,7 +1929,7 @@
             <a:fld id="{1D8BD707-D9CF-40AE-B4C6-C98DA3205C09}" type="datetimeFigureOut">
               <a:rPr lang="en-US" smtClean="0"/>
               <a:pPr/>
-              <a:t>10/25/2026</a:t>
+              <a:t>10/28/2026</a:t>
             </a:fld>
             <a:endParaRPr lang="en-US"/>
           </a:p>
@@ -2468,7 +2094,7 @@
             <a:fld id="{1D8BD707-D9CF-40AE-B4C6-C98DA3205C09}" type="datetimeFigureOut">
               <a:rPr lang="en-US" smtClean="0"/>
               <a:pPr/>
-              <a:t>10/25/2026</a:t>
+              <a:t>10/28/2026</a:t>
             </a:fld>
             <a:endParaRPr lang="en-US"/>
           </a:p>
@@ -2643,7 +2269,7 @@
             <a:fld id="{1D8BD707-D9CF-40AE-B4C6-C98DA3205C09}" type="datetimeFigureOut">
               <a:rPr lang="en-US" smtClean="0"/>
               <a:pPr/>
-              <a:t>10/25/2026</a:t>
+              <a:t>10/28/2026</a:t>
             </a:fld>
             <a:endParaRPr lang="en-US"/>
           </a:p>
@@ -2879,7 +2505,7 @@
           <a:p>
             <a:fld id="{5BCAD085-E8A6-8845-BD4E-CB4CCA059FC4}" type="datetimeFigureOut">
               <a:rPr lang="en-US" smtClean="0"/>
-              <a:t>10/25/2026</a:t>
+              <a:t>10/28/2026</a:t>
             </a:fld>
             <a:endParaRPr lang="en-US"/>
           </a:p>
@@ -3047,7 +2673,7 @@
           <a:p>
             <a:fld id="{5BCAD085-E8A6-8845-BD4E-CB4CCA059FC4}" type="datetimeFigureOut">
               <a:rPr lang="en-US" smtClean="0"/>
-              <a:t>10/25/2026</a:t>
+              <a:t>10/28/2026</a:t>
             </a:fld>
             <a:endParaRPr lang="en-US"/>
           </a:p>
@@ -3292,7 +2918,7 @@
           <a:p>
             <a:fld id="{5BCAD085-E8A6-8845-BD4E-CB4CCA059FC4}" type="datetimeFigureOut">
               <a:rPr lang="en-US" smtClean="0"/>
-              <a:t>10/25/2026</a:t>
+              <a:t>10/28/2026</a:t>
             </a:fld>
             <a:endParaRPr lang="en-US"/>
           </a:p>
@@ -3577,7 +3203,7 @@
           <a:p>
             <a:fld id="{5BCAD085-E8A6-8845-BD4E-CB4CCA059FC4}" type="datetimeFigureOut">
               <a:rPr lang="en-US" smtClean="0"/>
-              <a:t>10/25/2026</a:t>
+              <a:t>10/28/2026</a:t>
             </a:fld>
             <a:endParaRPr lang="en-US"/>
           </a:p>
@@ -3996,7 +3622,7 @@
           <a:p>
             <a:fld id="{5BCAD085-E8A6-8845-BD4E-CB4CCA059FC4}" type="datetimeFigureOut">
               <a:rPr lang="en-US" smtClean="0"/>
-              <a:t>10/25/2026</a:t>
+              <a:t>10/28/2026</a:t>
             </a:fld>
             <a:endParaRPr lang="en-US"/>
           </a:p>
@@ -4113,7 +3739,7 @@
           <a:p>
             <a:fld id="{5BCAD085-E8A6-8845-BD4E-CB4CCA059FC4}" type="datetimeFigureOut">
               <a:rPr lang="en-US" smtClean="0"/>
-              <a:t>10/25/2026</a:t>
+              <a:t>10/28/2026</a:t>
             </a:fld>
             <a:endParaRPr lang="en-US"/>
           </a:p>
@@ -4208,7 +3834,7 @@
           <a:p>
             <a:fld id="{5BCAD085-E8A6-8845-BD4E-CB4CCA059FC4}" type="datetimeFigureOut">
               <a:rPr lang="en-US" smtClean="0"/>
-              <a:t>10/25/2026</a:t>
+              <a:t>10/28/2026</a:t>
             </a:fld>
             <a:endParaRPr lang="en-US"/>
           </a:p>
@@ -4483,7 +4109,7 @@
           <a:p>
             <a:fld id="{5BCAD085-E8A6-8845-BD4E-CB4CCA059FC4}" type="datetimeFigureOut">
               <a:rPr lang="en-US" smtClean="0"/>
-              <a:t>10/25/2026</a:t>
+              <a:t>10/28/2026</a:t>
             </a:fld>
             <a:endParaRPr lang="en-US"/>
           </a:p>
@@ -4652,7 +4278,7 @@
             <a:fld id="{1D8BD707-D9CF-40AE-B4C6-C98DA3205C09}" type="datetimeFigureOut">
               <a:rPr lang="en-US" smtClean="0"/>
               <a:pPr/>
-              <a:t>10/25/2026</a:t>
+              <a:t>10/28/2026</a:t>
             </a:fld>
             <a:endParaRPr lang="en-US"/>
           </a:p>
@@ -4900,7 +4526,7 @@
           <a:p>
             <a:fld id="{5BCAD085-E8A6-8845-BD4E-CB4CCA059FC4}" type="datetimeFigureOut">
               <a:rPr lang="en-US" smtClean="0"/>
-              <a:t>10/25/2026</a:t>
+              <a:t>10/28/2026</a:t>
             </a:fld>
             <a:endParaRPr lang="en-US"/>
           </a:p>
@@ -5068,7 +4694,7 @@
           <a:p>
             <a:fld id="{5BCAD085-E8A6-8845-BD4E-CB4CCA059FC4}" type="datetimeFigureOut">
               <a:rPr lang="en-US" smtClean="0"/>
-              <a:t>10/25/2026</a:t>
+              <a:t>10/28/2026</a:t>
             </a:fld>
             <a:endParaRPr lang="en-US"/>
           </a:p>
@@ -5246,7 +4872,7 @@
           <a:p>
             <a:fld id="{5BCAD085-E8A6-8845-BD4E-CB4CCA059FC4}" type="datetimeFigureOut">
               <a:rPr lang="en-US" smtClean="0"/>
-              <a:t>10/25/2026</a:t>
+              <a:t>10/28/2026</a:t>
             </a:fld>
             <a:endParaRPr lang="en-US"/>
           </a:p>
@@ -5492,7 +5118,7 @@
             <a:fld id="{1D8BD707-D9CF-40AE-B4C6-C98DA3205C09}" type="datetimeFigureOut">
               <a:rPr lang="en-US" smtClean="0"/>
               <a:pPr/>
-              <a:t>10/25/2026</a:t>
+              <a:t>10/28/2026</a:t>
             </a:fld>
             <a:endParaRPr lang="en-US"/>
           </a:p>
@@ -5774,7 +5400,7 @@
             <a:fld id="{1D8BD707-D9CF-40AE-B4C6-C98DA3205C09}" type="datetimeFigureOut">
               <a:rPr lang="en-US" smtClean="0"/>
               <a:pPr/>
-              <a:t>10/25/2026</a:t>
+              <a:t>10/28/2026</a:t>
             </a:fld>
             <a:endParaRPr lang="en-US"/>
           </a:p>
@@ -6190,7 +5816,7 @@
             <a:fld id="{1D8BD707-D9CF-40AE-B4C6-C98DA3205C09}" type="datetimeFigureOut">
               <a:rPr lang="en-US" smtClean="0"/>
               <a:pPr/>
-              <a:t>10/25/2026</a:t>
+              <a:t>10/28/2026</a:t>
             </a:fld>
             <a:endParaRPr lang="en-US"/>
           </a:p>
@@ -6304,7 +5930,7 @@
             <a:fld id="{1D8BD707-D9CF-40AE-B4C6-C98DA3205C09}" type="datetimeFigureOut">
               <a:rPr lang="en-US" smtClean="0"/>
               <a:pPr/>
-              <a:t>10/25/2026</a:t>
+              <a:t>10/28/2026</a:t>
             </a:fld>
             <a:endParaRPr lang="en-US"/>
           </a:p>
@@ -6396,7 +6022,7 @@
             <a:fld id="{1D8BD707-D9CF-40AE-B4C6-C98DA3205C09}" type="datetimeFigureOut">
               <a:rPr lang="en-US" smtClean="0"/>
               <a:pPr/>
-              <a:t>10/25/2026</a:t>
+              <a:t>10/28/2026</a:t>
             </a:fld>
             <a:endParaRPr lang="en-US"/>
           </a:p>
@@ -6668,7 +6294,7 @@
             <a:fld id="{1D8BD707-D9CF-40AE-B4C6-C98DA3205C09}" type="datetimeFigureOut">
               <a:rPr lang="en-US" smtClean="0"/>
               <a:pPr/>
-              <a:t>10/25/2026</a:t>
+              <a:t>10/28/2026</a:t>
             </a:fld>
             <a:endParaRPr lang="en-US"/>
           </a:p>
@@ -6917,7 +6543,7 @@
             <a:fld id="{1D8BD707-D9CF-40AE-B4C6-C98DA3205C09}" type="datetimeFigureOut">
               <a:rPr lang="en-US" smtClean="0"/>
               <a:pPr/>
-              <a:t>10/25/2026</a:t>
+              <a:t>10/28/2026</a:t>
             </a:fld>
             <a:endParaRPr lang="en-US"/>
           </a:p>
@@ -7125,7 +6751,7 @@
             <a:fld id="{1D8BD707-D9CF-40AE-B4C6-C98DA3205C09}" type="datetimeFigureOut">
               <a:rPr lang="en-US" smtClean="0"/>
               <a:pPr/>
-              <a:t>10/25/2026</a:t>
+              <a:t>10/28/2026</a:t>
             </a:fld>
             <a:endParaRPr lang="en-US"/>
           </a:p>
@@ -7629,7 +7255,7 @@
           <a:p>
             <a:fld id="{5BCAD085-E8A6-8845-BD4E-CB4CCA059FC4}" type="datetimeFigureOut">
               <a:rPr lang="en-US" smtClean="0"/>
-              <a:t>10/25/2026</a:t>
+              <a:t>10/28/2026</a:t>
             </a:fld>
             <a:endParaRPr lang="en-US"/>
           </a:p>
@@ -14904,8 +14530,8 @@
         </p:nvSpPr>
         <p:spPr>
           <a:xfrm>
-            <a:off x="6100948" y="2369183"/>
-            <a:ext cx="10596813" cy="3318986"/>
+            <a:off x="6100947" y="2186644"/>
+            <a:ext cx="10596813" cy="3806298"/>
           </a:xfrm>
           <a:prstGeom prst="rect">
             <a:avLst/>
@@ -14973,6 +14599,31 @@
               <a:ea typeface="Roboto" panose="02000000000000000000" pitchFamily="2" charset="0"/>
               <a:cs typeface="Roboto" panose="02000000000000000000" pitchFamily="2" charset="0"/>
             </a:endParaRPr>
+          </a:p>
+          <a:p>
+            <a:pPr marL="457200" indent="-457200" algn="l">
+              <a:lnSpc>
+                <a:spcPts val="3757"/>
+              </a:lnSpc>
+              <a:buFont typeface="Arial" panose="020B0604020202020204" pitchFamily="34" charset="0"/>
+              <a:buChar char="•"/>
+            </a:pPr>
+            <a:r>
+              <a:rPr lang="en-US" sz="2800" b="1" dirty="0">
+                <a:latin typeface="Roboto" panose="02000000000000000000" pitchFamily="2" charset="0"/>
+                <a:ea typeface="Roboto" panose="02000000000000000000" pitchFamily="2" charset="0"/>
+                <a:cs typeface="Roboto" panose="02000000000000000000" pitchFamily="2" charset="0"/>
+              </a:rPr>
+              <a:t>Records: </a:t>
+            </a:r>
+            <a:r>
+              <a:rPr lang="en-US" sz="2800" dirty="0">
+                <a:latin typeface="Roboto" panose="02000000000000000000" pitchFamily="2" charset="0"/>
+                <a:ea typeface="Roboto" panose="02000000000000000000" pitchFamily="2" charset="0"/>
+                <a:cs typeface="Roboto" panose="02000000000000000000" pitchFamily="2" charset="0"/>
+              </a:rPr>
+              <a:t>1116</a:t>
+            </a:r>
           </a:p>
           <a:p>
             <a:pPr marL="457200" indent="-457200" algn="l">
